--- a/examples/effects-showcase/动效能力演示.pptx
+++ b/examples/effects-showcase/动效能力演示.pptx
@@ -2304,10 +2304,7 @@
                   <p:par>
                     <p:cTn id="3" fill="hold">
                       <p:stCondLst>
-                        <p:cond delay="indefinite"/>
-                        <p:cond evt="onBegin" delay="0">
-                          <p:tn val="2"/>
-                        </p:cond>
+                        <p:cond delay="0"/>
                       </p:stCondLst>
                       <p:childTnLst>
                         <p:par>
@@ -2324,7 +2321,11 @@
                                   <p:childTnLst>
                                     <p:set>
                                       <p:cBhvr>
-                                        <p:cTn id="5" dur="1"/>
+                                        <p:cTn id="5" dur="1" fill="hold">
+                                          <p:stCondLst>
+                                            <p:cond delay="0"/>
+                                          </p:stCondLst>
+                                        </p:cTn>
                                         <p:tgtEl>
                                           <p:spTgt spid="2"/>
                                         </p:tgtEl>
@@ -2357,15 +2358,28 @@
                                   </p:childTnLst>
                                 </p:cTn>
                               </p:par>
+                            </p:childTnLst>
+                          </p:cTn>
+                        </p:par>
+                        <p:par>
+                          <p:cTn id="8" fill="hold">
+                            <p:stCondLst>
+                              <p:cond delay="700"/>
+                            </p:stCondLst>
+                            <p:childTnLst>
                               <p:par>
                                 <p:cTn presetID="10" presetClass="entr" presetSubtype="0" fill="hold" grpId="0" nodeType="afterEffect">
                                   <p:stCondLst>
-                                    <p:cond delay="700"/>
+                                    <p:cond delay="0"/>
                                   </p:stCondLst>
                                   <p:childTnLst>
                                     <p:set>
                                       <p:cBhvr>
-                                        <p:cTn id="8" dur="1"/>
+                                        <p:cTn id="9" dur="1" fill="hold">
+                                          <p:stCondLst>
+                                            <p:cond delay="0"/>
+                                          </p:stCondLst>
+                                        </p:cTn>
                                         <p:tgtEl>
                                           <p:spTgt spid="3"/>
                                         </p:tgtEl>
@@ -2379,7 +2393,7 @@
                                     </p:set>
                                     <p:animEffect transition="in" filter="fade">
                                       <p:cBhvr>
-                                        <p:cTn id="9" dur="400"/>
+                                        <p:cTn id="10" dur="400"/>
                                         <p:tgtEl>
                                           <p:spTgt spid="3"/>
                                         </p:tgtEl>
@@ -3423,10 +3437,7 @@
                   <p:par>
                     <p:cTn id="3" fill="hold">
                       <p:stCondLst>
-                        <p:cond delay="indefinite"/>
-                        <p:cond evt="onBegin" delay="0">
-                          <p:tn val="2"/>
-                        </p:cond>
+                        <p:cond delay="0"/>
                       </p:stCondLst>
                       <p:childTnLst>
                         <p:par>
@@ -3443,7 +3454,11 @@
                                   <p:childTnLst>
                                     <p:set>
                                       <p:cBhvr>
-                                        <p:cTn id="5" dur="1"/>
+                                        <p:cTn id="5" dur="1" fill="hold">
+                                          <p:stCondLst>
+                                            <p:cond delay="0"/>
+                                          </p:stCondLst>
+                                        </p:cTn>
                                         <p:tgtEl>
                                           <p:spTgt spid="6"/>
                                         </p:tgtEl>
@@ -3466,15 +3481,28 @@
                                   </p:childTnLst>
                                 </p:cTn>
                               </p:par>
+                            </p:childTnLst>
+                          </p:cTn>
+                        </p:par>
+                        <p:par>
+                          <p:cTn id="7" fill="hold">
+                            <p:stCondLst>
+                              <p:cond delay="500"/>
+                            </p:stCondLst>
+                            <p:childTnLst>
                               <p:par>
                                 <p:cTn presetID="5" presetClass="entr" presetSubtype="0" fill="hold" grpId="0" nodeType="afterEffect">
                                   <p:stCondLst>
-                                    <p:cond delay="500"/>
+                                    <p:cond delay="0"/>
                                   </p:stCondLst>
                                   <p:childTnLst>
                                     <p:set>
                                       <p:cBhvr>
-                                        <p:cTn id="7" dur="1"/>
+                                        <p:cTn id="8" dur="1" fill="hold">
+                                          <p:stCondLst>
+                                            <p:cond delay="0"/>
+                                          </p:stCondLst>
+                                        </p:cTn>
                                         <p:tgtEl>
                                           <p:spTgt spid="9"/>
                                         </p:tgtEl>
@@ -3488,7 +3516,7 @@
                                     </p:set>
                                     <p:animEffect transition="in" filter="checkerboard(across)">
                                       <p:cBhvr>
-                                        <p:cTn id="8" dur="500"/>
+                                        <p:cTn id="9" dur="500"/>
                                         <p:tgtEl>
                                           <p:spTgt spid="9"/>
                                         </p:tgtEl>
@@ -3497,15 +3525,28 @@
                                   </p:childTnLst>
                                 </p:cTn>
                               </p:par>
+                            </p:childTnLst>
+                          </p:cTn>
+                        </p:par>
+                        <p:par>
+                          <p:cTn id="10" fill="hold">
+                            <p:stCondLst>
+                              <p:cond delay="1000"/>
+                            </p:stCondLst>
+                            <p:childTnLst>
                               <p:par>
                                 <p:cTn presetID="3" presetClass="entr" presetSubtype="0" fill="hold" grpId="0" nodeType="afterEffect">
                                   <p:stCondLst>
-                                    <p:cond delay="1000"/>
+                                    <p:cond delay="0"/>
                                   </p:stCondLst>
                                   <p:childTnLst>
                                     <p:set>
                                       <p:cBhvr>
-                                        <p:cTn id="9" dur="1"/>
+                                        <p:cTn id="11" dur="1" fill="hold">
+                                          <p:stCondLst>
+                                            <p:cond delay="0"/>
+                                          </p:stCondLst>
+                                        </p:cTn>
                                         <p:tgtEl>
                                           <p:spTgt spid="12"/>
                                         </p:tgtEl>
@@ -3519,7 +3560,7 @@
                                     </p:set>
                                     <p:animEffect transition="in" filter="blinds(horizontal)">
                                       <p:cBhvr>
-                                        <p:cTn id="10" dur="500"/>
+                                        <p:cTn id="12" dur="500"/>
                                         <p:tgtEl>
                                           <p:spTgt spid="12"/>
                                         </p:tgtEl>
@@ -3528,15 +3569,28 @@
                                   </p:childTnLst>
                                 </p:cTn>
                               </p:par>
+                            </p:childTnLst>
+                          </p:cTn>
+                        </p:par>
+                        <p:par>
+                          <p:cTn id="13" fill="hold">
+                            <p:stCondLst>
+                              <p:cond delay="1500"/>
+                            </p:stCondLst>
+                            <p:childTnLst>
                               <p:par>
                                 <p:cTn presetID="15" presetClass="entr" presetSubtype="0" fill="hold" grpId="0" nodeType="afterEffect">
                                   <p:stCondLst>
-                                    <p:cond delay="1500"/>
+                                    <p:cond delay="0"/>
                                   </p:stCondLst>
                                   <p:childTnLst>
                                     <p:set>
                                       <p:cBhvr>
-                                        <p:cTn id="11" dur="1"/>
+                                        <p:cTn id="14" dur="1" fill="hold">
+                                          <p:stCondLst>
+                                            <p:cond delay="0"/>
+                                          </p:stCondLst>
+                                        </p:cTn>
                                         <p:tgtEl>
                                           <p:spTgt spid="15"/>
                                         </p:tgtEl>
@@ -3550,7 +3604,7 @@
                                     </p:set>
                                     <p:animEffect transition="in" filter="circle">
                                       <p:cBhvr>
-                                        <p:cTn id="12" dur="500"/>
+                                        <p:cTn id="15" dur="500"/>
                                         <p:tgtEl>
                                           <p:spTgt spid="15"/>
                                         </p:tgtEl>
@@ -3559,15 +3613,28 @@
                                   </p:childTnLst>
                                 </p:cTn>
                               </p:par>
+                            </p:childTnLst>
+                          </p:cTn>
+                        </p:par>
+                        <p:par>
+                          <p:cTn id="16" fill="hold">
+                            <p:stCondLst>
+                              <p:cond delay="2000"/>
+                            </p:stCondLst>
+                            <p:childTnLst>
                               <p:par>
                                 <p:cTn presetID="31" presetClass="entr" presetSubtype="0" fill="hold" grpId="0" nodeType="afterEffect">
                                   <p:stCondLst>
-                                    <p:cond delay="2000"/>
+                                    <p:cond delay="0"/>
                                   </p:stCondLst>
                                   <p:childTnLst>
                                     <p:set>
                                       <p:cBhvr>
-                                        <p:cTn id="13" dur="1"/>
+                                        <p:cTn id="17" dur="1" fill="hold">
+                                          <p:stCondLst>
+                                            <p:cond delay="0"/>
+                                          </p:stCondLst>
+                                        </p:cTn>
                                         <p:tgtEl>
                                           <p:spTgt spid="18"/>
                                         </p:tgtEl>
@@ -3581,7 +3648,7 @@
                                     </p:set>
                                     <p:animEffect transition="in" filter="strips(downRight)">
                                       <p:cBhvr>
-                                        <p:cTn id="14" dur="500"/>
+                                        <p:cTn id="18" dur="500"/>
                                         <p:tgtEl>
                                           <p:spTgt spid="18"/>
                                         </p:tgtEl>
@@ -3590,15 +3657,28 @@
                                   </p:childTnLst>
                                 </p:cTn>
                               </p:par>
+                            </p:childTnLst>
+                          </p:cTn>
+                        </p:par>
+                        <p:par>
+                          <p:cTn id="19" fill="hold">
+                            <p:stCondLst>
+                              <p:cond delay="2500"/>
+                            </p:stCondLst>
+                            <p:childTnLst>
                               <p:par>
                                 <p:cTn presetID="9" presetClass="entr" presetSubtype="0" fill="hold" grpId="0" nodeType="afterEffect">
                                   <p:stCondLst>
-                                    <p:cond delay="2500"/>
+                                    <p:cond delay="0"/>
                                   </p:stCondLst>
                                   <p:childTnLst>
                                     <p:set>
                                       <p:cBhvr>
-                                        <p:cTn id="15" dur="1"/>
+                                        <p:cTn id="20" dur="1" fill="hold">
+                                          <p:stCondLst>
+                                            <p:cond delay="0"/>
+                                          </p:stCondLst>
+                                        </p:cTn>
                                         <p:tgtEl>
                                           <p:spTgt spid="21"/>
                                         </p:tgtEl>
@@ -3612,7 +3692,7 @@
                                     </p:set>
                                     <p:animEffect transition="in" filter="dissolve">
                                       <p:cBhvr>
-                                        <p:cTn id="16" dur="500"/>
+                                        <p:cTn id="21" dur="500"/>
                                         <p:tgtEl>
                                           <p:spTgt spid="21"/>
                                         </p:tgtEl>
@@ -3621,15 +3701,28 @@
                                   </p:childTnLst>
                                 </p:cTn>
                               </p:par>
+                            </p:childTnLst>
+                          </p:cTn>
+                        </p:par>
+                        <p:par>
+                          <p:cTn id="22" fill="hold">
+                            <p:stCondLst>
+                              <p:cond delay="3000"/>
+                            </p:stCondLst>
+                            <p:childTnLst>
                               <p:par>
                                 <p:cTn presetID="27" presetClass="entr" presetSubtype="0" fill="hold" grpId="0" nodeType="afterEffect">
                                   <p:stCondLst>
-                                    <p:cond delay="3000"/>
+                                    <p:cond delay="0"/>
                                   </p:stCondLst>
                                   <p:childTnLst>
                                     <p:set>
                                       <p:cBhvr>
-                                        <p:cTn id="17" dur="1"/>
+                                        <p:cTn id="23" dur="1" fill="hold">
+                                          <p:stCondLst>
+                                            <p:cond delay="0"/>
+                                          </p:stCondLst>
+                                        </p:cTn>
                                         <p:tgtEl>
                                           <p:spTgt spid="24"/>
                                         </p:tgtEl>
@@ -3643,7 +3736,7 @@
                                     </p:set>
                                     <p:animEffect transition="in" filter="wedge">
                                       <p:cBhvr>
-                                        <p:cTn id="18" dur="500"/>
+                                        <p:cTn id="24" dur="500"/>
                                         <p:tgtEl>
                                           <p:spTgt spid="24"/>
                                         </p:tgtEl>
@@ -3652,15 +3745,28 @@
                                   </p:childTnLst>
                                 </p:cTn>
                               </p:par>
+                            </p:childTnLst>
+                          </p:cTn>
+                        </p:par>
+                        <p:par>
+                          <p:cTn id="25" fill="hold">
+                            <p:stCondLst>
+                              <p:cond delay="3500"/>
+                            </p:stCondLst>
+                            <p:childTnLst>
                               <p:par>
                                 <p:cTn presetID="4" presetClass="entr" presetSubtype="0" fill="hold" grpId="0" nodeType="afterEffect">
                                   <p:stCondLst>
-                                    <p:cond delay="3500"/>
+                                    <p:cond delay="0"/>
                                   </p:stCondLst>
                                   <p:childTnLst>
                                     <p:set>
                                       <p:cBhvr>
-                                        <p:cTn id="19" dur="1"/>
+                                        <p:cTn id="26" dur="1" fill="hold">
+                                          <p:stCondLst>
+                                            <p:cond delay="0"/>
+                                          </p:stCondLst>
+                                        </p:cTn>
                                         <p:tgtEl>
                                           <p:spTgt spid="27"/>
                                         </p:tgtEl>
@@ -3674,7 +3780,7 @@
                                     </p:set>
                                     <p:animEffect transition="in" filter="randombar(horizontal)">
                                       <p:cBhvr>
-                                        <p:cTn id="20" dur="500"/>
+                                        <p:cTn id="27" dur="500"/>
                                         <p:tgtEl>
                                           <p:spTgt spid="27"/>
                                         </p:tgtEl>
@@ -4167,10 +4273,7 @@
                   <p:par>
                     <p:cTn id="3" fill="hold">
                       <p:stCondLst>
-                        <p:cond delay="indefinite"/>
-                        <p:cond evt="onBegin" delay="0">
-                          <p:tn val="2"/>
-                        </p:cond>
+                        <p:cond delay="0"/>
                       </p:stCondLst>
                       <p:childTnLst>
                         <p:par>
@@ -4187,7 +4290,11 @@
                                   <p:childTnLst>
                                     <p:set>
                                       <p:cBhvr>
-                                        <p:cTn id="5" dur="1"/>
+                                        <p:cTn id="5" dur="1" fill="hold">
+                                          <p:stCondLst>
+                                            <p:cond delay="0"/>
+                                          </p:stCondLst>
+                                        </p:cTn>
                                         <p:tgtEl>
                                           <p:spTgt spid="6"/>
                                         </p:tgtEl>
@@ -4220,15 +4327,24 @@
                                   </p:childTnLst>
                                 </p:cTn>
                               </p:par>
+                            </p:childTnLst>
+                          </p:cTn>
+                        </p:par>
+                        <p:par>
+                          <p:cTn id="8" fill="hold">
+                            <p:stCondLst>
+                              <p:cond delay="500"/>
+                            </p:stCondLst>
+                            <p:childTnLst>
                               <p:par>
                                 <p:cTn presetID="26" presetClass="emph" presetSubtype="0" fill="hold" grpId="0" nodeType="afterEffect">
                                   <p:stCondLst>
-                                    <p:cond delay="500"/>
+                                    <p:cond delay="0"/>
                                   </p:stCondLst>
                                   <p:childTnLst>
                                     <p:animScale>
                                       <p:cBhvr>
-                                        <p:cTn id="8" dur="600" autoRev="1" repeatCount="2x"/>
+                                        <p:cTn id="9" dur="600" autoRev="1" repeatCount="2x"/>
                                         <p:tgtEl>
                                           <p:spTgt spid="6"/>
                                         </p:tgtEl>
@@ -4239,15 +4355,24 @@
                                   </p:childTnLst>
                                 </p:cTn>
                               </p:par>
+                            </p:childTnLst>
+                          </p:cTn>
+                        </p:par>
+                        <p:par>
+                          <p:cTn id="10" fill="hold">
+                            <p:stCondLst>
+                              <p:cond delay="1100"/>
+                            </p:stCondLst>
+                            <p:childTnLst>
                               <p:par>
                                 <p:cTn presetID="8" presetClass="emph" presetSubtype="0" fill="hold" grpId="0" nodeType="afterEffect">
                                   <p:stCondLst>
-                                    <p:cond delay="1100"/>
+                                    <p:cond delay="0"/>
                                   </p:stCondLst>
                                   <p:childTnLst>
                                     <p:animRot by="21600000">
                                       <p:cBhvr>
-                                        <p:cTn id="9" dur="1200"/>
+                                        <p:cTn id="11" dur="1200"/>
                                         <p:tgtEl>
                                           <p:spTgt spid="8"/>
                                         </p:tgtEl>
@@ -4259,15 +4384,28 @@
                                   </p:childTnLst>
                                 </p:cTn>
                               </p:par>
+                            </p:childTnLst>
+                          </p:cTn>
+                        </p:par>
+                        <p:par>
+                          <p:cTn id="12" fill="hold">
+                            <p:stCondLst>
+                              <p:cond delay="2300"/>
+                            </p:stCondLst>
+                            <p:childTnLst>
                               <p:par>
                                 <p:cTn presetID="10" presetClass="entr" presetSubtype="0" fill="hold" grpId="0" nodeType="afterEffect">
                                   <p:stCondLst>
-                                    <p:cond delay="2300"/>
+                                    <p:cond delay="0"/>
                                   </p:stCondLst>
                                   <p:childTnLst>
                                     <p:set>
                                       <p:cBhvr>
-                                        <p:cTn id="10" dur="1"/>
+                                        <p:cTn id="13" dur="1" fill="hold">
+                                          <p:stCondLst>
+                                            <p:cond delay="0"/>
+                                          </p:stCondLst>
+                                        </p:cTn>
                                         <p:tgtEl>
                                           <p:spTgt spid="10"/>
                                         </p:tgtEl>
@@ -4281,7 +4419,7 @@
                                     </p:set>
                                     <p:animEffect transition="in" filter="fade">
                                       <p:cBhvr>
-                                        <p:cTn id="11" dur="350"/>
+                                        <p:cTn id="14" dur="350"/>
                                         <p:tgtEl>
                                           <p:spTgt spid="10"/>
                                         </p:tgtEl>
@@ -4290,15 +4428,24 @@
                                   </p:childTnLst>
                                 </p:cTn>
                               </p:par>
+                            </p:childTnLst>
+                          </p:cTn>
+                        </p:par>
+                        <p:par>
+                          <p:cTn id="15" fill="hold">
+                            <p:stCondLst>
+                              <p:cond delay="2650"/>
+                            </p:stCondLst>
+                            <p:childTnLst>
                               <p:par>
                                 <p:cTn presetID="1" presetClass="emph" presetSubtype="0" fill="hold" grpId="0" nodeType="afterEffect">
                                   <p:stCondLst>
-                                    <p:cond delay="2650"/>
+                                    <p:cond delay="0"/>
                                   </p:stCondLst>
                                   <p:childTnLst>
                                     <p:animClr clrSpc="rgb" dir="cw">
                                       <p:cBhvr>
-                                        <p:cTn id="12" dur="600"/>
+                                        <p:cTn id="16" dur="600"/>
                                         <p:tgtEl>
                                           <p:spTgt spid="10"/>
                                         </p:tgtEl>
@@ -4313,15 +4460,24 @@
                                   </p:childTnLst>
                                 </p:cTn>
                               </p:par>
+                            </p:childTnLst>
+                          </p:cTn>
+                        </p:par>
+                        <p:par>
+                          <p:cTn id="17" fill="hold">
+                            <p:stCondLst>
+                              <p:cond delay="3250"/>
+                            </p:stCondLst>
+                            <p:childTnLst>
                               <p:par>
                                 <p:cTn presetID="6" presetClass="emph" presetSubtype="0" fill="hold" grpId="0" nodeType="afterEffect">
                                   <p:stCondLst>
-                                    <p:cond delay="3250"/>
+                                    <p:cond delay="0"/>
                                   </p:stCondLst>
                                   <p:childTnLst>
                                     <p:animScale>
                                       <p:cBhvr>
-                                        <p:cTn id="13" dur="600" autoRev="1" repeatCount="2x"/>
+                                        <p:cTn id="18" dur="600" autoRev="1" repeatCount="2x"/>
                                         <p:tgtEl>
                                           <p:spTgt spid="12"/>
                                         </p:tgtEl>
@@ -4747,10 +4903,7 @@
                   <p:par>
                     <p:cTn id="3" fill="hold">
                       <p:stCondLst>
-                        <p:cond delay="indefinite"/>
-                        <p:cond evt="onBegin" delay="0">
-                          <p:tn val="2"/>
-                        </p:cond>
+                        <p:cond delay="0"/>
                       </p:stCondLst>
                       <p:childTnLst>
                         <p:par>
@@ -4767,7 +4920,11 @@
                                   <p:childTnLst>
                                     <p:set>
                                       <p:cBhvr>
-                                        <p:cTn id="5" dur="1"/>
+                                        <p:cTn id="5" dur="1" fill="hold">
+                                          <p:stCondLst>
+                                            <p:cond delay="0"/>
+                                          </p:stCondLst>
+                                        </p:cTn>
                                         <p:tgtEl>
                                           <p:spTgt spid="6"/>
                                         </p:tgtEl>
@@ -4790,15 +4947,24 @@
                                   </p:childTnLst>
                                 </p:cTn>
                               </p:par>
+                            </p:childTnLst>
+                          </p:cTn>
+                        </p:par>
+                        <p:par>
+                          <p:cTn id="7" fill="hold">
+                            <p:stCondLst>
+                              <p:cond delay="300"/>
+                            </p:stCondLst>
+                            <p:childTnLst>
                               <p:par>
                                 <p:cTn presetID="0" presetClass="path" presetSubtype="0" fill="hold" grpId="0" nodeType="afterEffect">
                                   <p:stCondLst>
-                                    <p:cond delay="300"/>
+                                    <p:cond delay="0"/>
                                   </p:stCondLst>
                                   <p:childTnLst>
                                     <p:animMotion origin="layout" pathEditMode="relative" path="M 0 0 L 0.32 -0.06 E" ptsTypes="AA">
                                       <p:cBhvr>
-                                        <p:cTn id="7" dur="900" autoRev="1" repeatCount="3x"/>
+                                        <p:cTn id="8" dur="900" autoRev="1" repeatCount="3x"/>
                                         <p:tgtEl>
                                           <p:spTgt spid="6"/>
                                         </p:tgtEl>
@@ -4807,15 +4973,28 @@
                                   </p:childTnLst>
                                 </p:cTn>
                               </p:par>
+                            </p:childTnLst>
+                          </p:cTn>
+                        </p:par>
+                        <p:par>
+                          <p:cTn id="9" fill="hold">
+                            <p:stCondLst>
+                              <p:cond delay="1200"/>
+                            </p:stCondLst>
+                            <p:childTnLst>
                               <p:par>
                                 <p:cTn presetID="10" presetClass="entr" presetSubtype="0" fill="hold" grpId="0" nodeType="afterEffect">
                                   <p:stCondLst>
-                                    <p:cond delay="1200"/>
+                                    <p:cond delay="0"/>
                                   </p:stCondLst>
                                   <p:childTnLst>
                                     <p:set>
                                       <p:cBhvr>
-                                        <p:cTn id="8" dur="1"/>
+                                        <p:cTn id="10" dur="1" fill="hold">
+                                          <p:stCondLst>
+                                            <p:cond delay="0"/>
+                                          </p:stCondLst>
+                                        </p:cTn>
                                         <p:tgtEl>
                                           <p:spTgt spid="8"/>
                                         </p:tgtEl>
@@ -4829,7 +5008,7 @@
                                     </p:set>
                                     <p:animEffect transition="in" filter="fade">
                                       <p:cBhvr>
-                                        <p:cTn id="9" dur="300"/>
+                                        <p:cTn id="11" dur="300"/>
                                         <p:tgtEl>
                                           <p:spTgt spid="8"/>
                                         </p:tgtEl>
@@ -4838,15 +5017,24 @@
                                   </p:childTnLst>
                                 </p:cTn>
                               </p:par>
+                            </p:childTnLst>
+                          </p:cTn>
+                        </p:par>
+                        <p:par>
+                          <p:cTn id="12" fill="hold">
+                            <p:stCondLst>
+                              <p:cond delay="1500"/>
+                            </p:stCondLst>
+                            <p:childTnLst>
                               <p:par>
                                 <p:cTn presetID="0" presetClass="path" presetSubtype="0" fill="hold" grpId="0" nodeType="afterEffect">
                                   <p:stCondLst>
-                                    <p:cond delay="1500"/>
+                                    <p:cond delay="0"/>
                                   </p:stCondLst>
                                   <p:childTnLst>
                                     <p:animMotion origin="layout" pathEditMode="relative" path="M 0 0 L 0.3 0 E" ptsTypes="AA">
                                       <p:cBhvr>
-                                        <p:cTn id="10" dur="800" autoRev="1" repeatCount="2x"/>
+                                        <p:cTn id="13" dur="800" autoRev="1" repeatCount="2x"/>
                                         <p:tgtEl>
                                           <p:spTgt spid="8"/>
                                         </p:tgtEl>
@@ -5082,10 +5270,7 @@
                   <p:par>
                     <p:cTn id="3" fill="hold">
                       <p:stCondLst>
-                        <p:cond delay="indefinite"/>
-                        <p:cond evt="onBegin" delay="0">
-                          <p:tn val="2"/>
-                        </p:cond>
+                        <p:cond delay="0"/>
                       </p:stCondLst>
                       <p:childTnLst>
                         <p:par>
@@ -5102,7 +5287,11 @@
                                   <p:childTnLst>
                                     <p:set>
                                       <p:cBhvr>
-                                        <p:cTn id="5" dur="1"/>
+                                        <p:cTn id="5" dur="1" fill="hold">
+                                          <p:stCondLst>
+                                            <p:cond delay="0"/>
+                                          </p:stCondLst>
+                                        </p:cTn>
                                         <p:tgtEl>
                                           <p:spTgt spid="6"/>
                                         </p:tgtEl>
@@ -5125,15 +5314,28 @@
                                   </p:childTnLst>
                                 </p:cTn>
                               </p:par>
+                            </p:childTnLst>
+                          </p:cTn>
+                        </p:par>
+                        <p:par>
+                          <p:cTn id="7" fill="hold">
+                            <p:stCondLst>
+                              <p:cond delay="700"/>
+                            </p:stCondLst>
+                            <p:childTnLst>
                               <p:par>
                                 <p:cTn presetID="10" presetClass="entr" presetSubtype="0" fill="hold" grpId="0" nodeType="afterEffect">
                                   <p:stCondLst>
-                                    <p:cond delay="700"/>
+                                    <p:cond delay="0"/>
                                   </p:stCondLst>
                                   <p:childTnLst>
                                     <p:set>
                                       <p:cBhvr>
-                                        <p:cTn id="7" dur="1"/>
+                                        <p:cTn id="8" dur="1" fill="hold">
+                                          <p:stCondLst>
+                                            <p:cond delay="0"/>
+                                          </p:stCondLst>
+                                        </p:cTn>
                                         <p:tgtEl>
                                           <p:spTgt spid="7"/>
                                         </p:tgtEl>
@@ -5147,7 +5349,7 @@
                                     </p:set>
                                     <p:animEffect transition="in" filter="fade">
                                       <p:cBhvr>
-                                        <p:cTn id="8" dur="700"/>
+                                        <p:cTn id="9" dur="700"/>
                                         <p:tgtEl>
                                           <p:spTgt spid="7"/>
                                         </p:tgtEl>
@@ -5482,7 +5684,11 @@
                                   <p:childTnLst>
                                     <p:set>
                                       <p:cBhvr>
-                                        <p:cTn id="5" dur="1"/>
+                                        <p:cTn id="5" dur="1" fill="hold">
+                                          <p:stCondLst>
+                                            <p:cond delay="0"/>
+                                          </p:stCondLst>
+                                        </p:cTn>
                                         <p:tgtEl>
                                           <p:txEl>
                                             <p:pRg st="0" end="0"/>
@@ -5535,7 +5741,11 @@
                                   <p:childTnLst>
                                     <p:set>
                                       <p:cBhvr>
-                                        <p:cTn id="9" dur="1"/>
+                                        <p:cTn id="9" dur="1" fill="hold">
+                                          <p:stCondLst>
+                                            <p:cond delay="0"/>
+                                          </p:stCondLst>
+                                        </p:cTn>
                                         <p:tgtEl>
                                           <p:txEl>
                                             <p:pRg st="1" end="1"/>
@@ -5588,7 +5798,11 @@
                                   <p:childTnLst>
                                     <p:set>
                                       <p:cBhvr>
-                                        <p:cTn id="13" dur="1"/>
+                                        <p:cTn id="13" dur="1" fill="hold">
+                                          <p:stCondLst>
+                                            <p:cond delay="0"/>
+                                          </p:stCondLst>
+                                        </p:cTn>
                                         <p:tgtEl>
                                           <p:txEl>
                                             <p:pRg st="2" end="2"/>
@@ -5641,7 +5855,11 @@
                                   <p:childTnLst>
                                     <p:set>
                                       <p:cBhvr>
-                                        <p:cTn id="17" dur="1"/>
+                                        <p:cTn id="17" dur="1" fill="hold">
+                                          <p:stCondLst>
+                                            <p:cond delay="0"/>
+                                          </p:stCondLst>
+                                        </p:cTn>
                                         <p:tgtEl>
                                           <p:txEl>
                                             <p:pRg st="3" end="3"/>
@@ -6119,10 +6337,7 @@
                   <p:par>
                     <p:cTn id="3" fill="hold">
                       <p:stCondLst>
-                        <p:cond delay="indefinite"/>
-                        <p:cond evt="onBegin" delay="0">
-                          <p:tn val="2"/>
-                        </p:cond>
+                        <p:cond delay="0"/>
                       </p:stCondLst>
                       <p:childTnLst>
                         <p:par>
@@ -6139,7 +6354,11 @@
                                   <p:childTnLst>
                                     <p:set>
                                       <p:cBhvr>
-                                        <p:cTn id="5" dur="1"/>
+                                        <p:cTn id="5" dur="1" fill="hold">
+                                          <p:stCondLst>
+                                            <p:cond delay="0"/>
+                                          </p:stCondLst>
+                                        </p:cTn>
                                         <p:tgtEl>
                                           <p:spTgt spid="6"/>
                                         </p:tgtEl>
@@ -6162,15 +6381,28 @@
                                   </p:childTnLst>
                                 </p:cTn>
                               </p:par>
+                            </p:childTnLst>
+                          </p:cTn>
+                        </p:par>
+                        <p:par>
+                          <p:cTn id="7" fill="hold">
+                            <p:stCondLst>
+                              <p:cond delay="300"/>
+                            </p:stCondLst>
+                            <p:childTnLst>
                               <p:par>
                                 <p:cTn presetID="10" presetClass="entr" presetSubtype="0" fill="hold" grpId="0" nodeType="afterEffect">
                                   <p:stCondLst>
-                                    <p:cond delay="300"/>
+                                    <p:cond delay="0"/>
                                   </p:stCondLst>
                                   <p:childTnLst>
                                     <p:set>
                                       <p:cBhvr>
-                                        <p:cTn id="7" dur="1"/>
+                                        <p:cTn id="8" dur="1" fill="hold">
+                                          <p:stCondLst>
+                                            <p:cond delay="0"/>
+                                          </p:stCondLst>
+                                        </p:cTn>
                                         <p:tgtEl>
                                           <p:spTgt spid="8"/>
                                         </p:tgtEl>
@@ -6184,7 +6416,7 @@
                                     </p:set>
                                     <p:animEffect transition="in" filter="fade">
                                       <p:cBhvr>
-                                        <p:cTn id="8" dur="300"/>
+                                        <p:cTn id="9" dur="300"/>
                                         <p:tgtEl>
                                           <p:spTgt spid="8"/>
                                         </p:tgtEl>
@@ -6193,15 +6425,28 @@
                                   </p:childTnLst>
                                 </p:cTn>
                               </p:par>
+                            </p:childTnLst>
+                          </p:cTn>
+                        </p:par>
+                        <p:par>
+                          <p:cTn id="10" fill="hold">
+                            <p:stCondLst>
+                              <p:cond delay="600"/>
+                            </p:stCondLst>
+                            <p:childTnLst>
                               <p:par>
                                 <p:cTn presetID="10" presetClass="entr" presetSubtype="0" fill="hold" grpId="0" nodeType="afterEffect">
                                   <p:stCondLst>
-                                    <p:cond delay="600"/>
+                                    <p:cond delay="0"/>
                                   </p:stCondLst>
                                   <p:childTnLst>
                                     <p:set>
                                       <p:cBhvr>
-                                        <p:cTn id="9" dur="1"/>
+                                        <p:cTn id="11" dur="1" fill="hold">
+                                          <p:stCondLst>
+                                            <p:cond delay="0"/>
+                                          </p:stCondLst>
+                                        </p:cTn>
                                         <p:tgtEl>
                                           <p:spTgt spid="10"/>
                                         </p:tgtEl>
@@ -6215,7 +6460,7 @@
                                     </p:set>
                                     <p:animEffect transition="in" filter="fade">
                                       <p:cBhvr>
-                                        <p:cTn id="10" dur="300"/>
+                                        <p:cTn id="12" dur="300"/>
                                         <p:tgtEl>
                                           <p:spTgt spid="10"/>
                                         </p:tgtEl>
@@ -6224,15 +6469,24 @@
                                   </p:childTnLst>
                                 </p:cTn>
                               </p:par>
+                            </p:childTnLst>
+                          </p:cTn>
+                        </p:par>
+                        <p:par>
+                          <p:cTn id="13" fill="hold">
+                            <p:stCondLst>
+                              <p:cond delay="900"/>
+                            </p:stCondLst>
+                            <p:childTnLst>
                               <p:par>
                                 <p:cTn presetID="10" presetClass="exit" presetSubtype="0" fill="hold" grpId="0" nodeType="afterEffect">
                                   <p:stCondLst>
-                                    <p:cond delay="900"/>
+                                    <p:cond delay="0"/>
                                   </p:stCondLst>
                                   <p:childTnLst>
                                     <p:animEffect transition="out" filter="fade">
                                       <p:cBhvr>
-                                        <p:cTn id="11" dur="400"/>
+                                        <p:cTn id="14" dur="400"/>
                                         <p:tgtEl>
                                           <p:spTgt spid="6"/>
                                         </p:tgtEl>
@@ -6240,7 +6494,7 @@
                                     </p:animEffect>
                                     <p:set>
                                       <p:cBhvr>
-                                        <p:cTn id="12" dur="1" fill="hold">
+                                        <p:cTn id="15" dur="1" fill="hold">
                                           <p:stCondLst>
                                             <p:cond delay="399"/>
                                           </p:stCondLst>
@@ -6259,15 +6513,24 @@
                                   </p:childTnLst>
                                 </p:cTn>
                               </p:par>
+                            </p:childTnLst>
+                          </p:cTn>
+                        </p:par>
+                        <p:par>
+                          <p:cTn id="16" fill="hold">
+                            <p:stCondLst>
+                              <p:cond delay="1300"/>
+                            </p:stCondLst>
+                            <p:childTnLst>
                               <p:par>
                                 <p:cTn presetID="10" presetClass="exit" presetSubtype="0" fill="hold" grpId="0" nodeType="afterEffect">
                                   <p:stCondLst>
-                                    <p:cond delay="1300"/>
+                                    <p:cond delay="0"/>
                                   </p:stCondLst>
                                   <p:childTnLst>
                                     <p:animEffect transition="out" filter="fade">
                                       <p:cBhvr>
-                                        <p:cTn id="13" dur="400"/>
+                                        <p:cTn id="17" dur="400"/>
                                         <p:tgtEl>
                                           <p:spTgt spid="8"/>
                                         </p:tgtEl>
@@ -6275,7 +6538,7 @@
                                     </p:animEffect>
                                     <p:set>
                                       <p:cBhvr>
-                                        <p:cTn id="14" dur="1" fill="hold">
+                                        <p:cTn id="18" dur="1" fill="hold">
                                           <p:stCondLst>
                                             <p:cond delay="399"/>
                                           </p:stCondLst>
@@ -6294,15 +6557,24 @@
                                   </p:childTnLst>
                                 </p:cTn>
                               </p:par>
+                            </p:childTnLst>
+                          </p:cTn>
+                        </p:par>
+                        <p:par>
+                          <p:cTn id="19" fill="hold">
+                            <p:stCondLst>
+                              <p:cond delay="1700"/>
+                            </p:stCondLst>
+                            <p:childTnLst>
                               <p:par>
                                 <p:cTn presetID="10" presetClass="exit" presetSubtype="0" fill="hold" grpId="0" nodeType="afterEffect">
                                   <p:stCondLst>
-                                    <p:cond delay="1700"/>
+                                    <p:cond delay="0"/>
                                   </p:stCondLst>
                                   <p:childTnLst>
                                     <p:animEffect transition="out" filter="fade">
                                       <p:cBhvr>
-                                        <p:cTn id="15" dur="400"/>
+                                        <p:cTn id="20" dur="400"/>
                                         <p:tgtEl>
                                           <p:spTgt spid="10"/>
                                         </p:tgtEl>
@@ -6310,7 +6582,7 @@
                                     </p:animEffect>
                                     <p:set>
                                       <p:cBhvr>
-                                        <p:cTn id="16" dur="1" fill="hold">
+                                        <p:cTn id="21" dur="1" fill="hold">
                                           <p:stCondLst>
                                             <p:cond delay="399"/>
                                           </p:stCondLst>
@@ -6332,12 +6604,12 @@
                               <p:par>
                                 <p:cTn presetID="2" presetClass="exit" presetSubtype="2" fill="hold" grpId="0" nodeType="withEffect">
                                   <p:stCondLst>
-                                    <p:cond delay="1700"/>
+                                    <p:cond delay="0"/>
                                   </p:stCondLst>
                                   <p:childTnLst>
                                     <p:anim calcmode="lin" valueType="num">
                                       <p:cBhvr additive="base">
-                                        <p:cTn id="17" dur="500"/>
+                                        <p:cTn id="22" dur="500"/>
                                         <p:tgtEl>
                                           <p:spTgt spid="12"/>
                                         </p:tgtEl>
@@ -6360,7 +6632,7 @@
                                     </p:anim>
                                     <p:anim calcmode="lin" valueType="num">
                                       <p:cBhvr additive="base">
-                                        <p:cTn id="18" dur="500"/>
+                                        <p:cTn id="23" dur="500"/>
                                         <p:tgtEl>
                                           <p:spTgt spid="12"/>
                                         </p:tgtEl>
@@ -6383,7 +6655,7 @@
                                     </p:anim>
                                     <p:set>
                                       <p:cBhvr>
-                                        <p:cTn id="19" dur="1" fill="hold">
+                                        <p:cTn id="24" dur="1" fill="hold">
                                           <p:stCondLst>
                                             <p:cond delay="499"/>
                                           </p:stCondLst>
@@ -6402,15 +6674,28 @@
                                   </p:childTnLst>
                                 </p:cTn>
                               </p:par>
+                            </p:childTnLst>
+                          </p:cTn>
+                        </p:par>
+                        <p:par>
+                          <p:cTn id="25" fill="hold">
+                            <p:stCondLst>
+                              <p:cond delay="2100"/>
+                            </p:stCondLst>
+                            <p:childTnLst>
                               <p:par>
                                 <p:cTn presetID="10" presetClass="entr" presetSubtype="0" fill="hold" grpId="0" nodeType="afterEffect">
                                   <p:stCondLst>
-                                    <p:cond delay="2100"/>
+                                    <p:cond delay="0"/>
                                   </p:stCondLst>
                                   <p:childTnLst>
                                     <p:set>
                                       <p:cBhvr>
-                                        <p:cTn id="20" dur="1"/>
+                                        <p:cTn id="26" dur="1" fill="hold">
+                                          <p:stCondLst>
+                                            <p:cond delay="0"/>
+                                          </p:stCondLst>
+                                        </p:cTn>
                                         <p:tgtEl>
                                           <p:spTgt spid="13"/>
                                         </p:tgtEl>
@@ -6424,7 +6709,7 @@
                                     </p:set>
                                     <p:animEffect transition="in" filter="fade">
                                       <p:cBhvr>
-                                        <p:cTn id="21" dur="600"/>
+                                        <p:cTn id="27" dur="600"/>
                                         <p:tgtEl>
                                           <p:spTgt spid="13"/>
                                         </p:tgtEl>
@@ -6592,10 +6877,7 @@
                   <p:par>
                     <p:cTn id="3" fill="hold">
                       <p:stCondLst>
-                        <p:cond delay="indefinite"/>
-                        <p:cond evt="onBegin" delay="0">
-                          <p:tn val="2"/>
-                        </p:cond>
+                        <p:cond delay="0"/>
                       </p:stCondLst>
                       <p:childTnLst>
                         <p:par>
@@ -6612,7 +6894,11 @@
                                   <p:childTnLst>
                                     <p:set>
                                       <p:cBhvr>
-                                        <p:cTn id="5" dur="1"/>
+                                        <p:cTn id="5" dur="1" fill="hold">
+                                          <p:stCondLst>
+                                            <p:cond delay="0"/>
+                                          </p:stCondLst>
+                                        </p:cTn>
                                         <p:tgtEl>
                                           <p:spTgt spid="2"/>
                                         </p:tgtEl>

--- a/examples/effects-showcase/动效能力演示.pptx
+++ b/examples/effects-showcase/动效能力演示.pptx
@@ -382,7 +382,9 @@
   </c:chart>
   <c:spPr>
     <a:solidFill>
-      <a:srgbClr val="0B1B33"/>
+      <a:srgbClr val="0B1B33">
+        <a:alpha val="0"/>
+      </a:srgbClr>
     </a:solidFill>
     <a:ln>
       <a:noFill/>
@@ -810,7 +812,9 @@
   </c:chart>
   <c:spPr>
     <a:solidFill>
-      <a:srgbClr val="0B1B33"/>
+      <a:srgbClr val="0B1B33">
+        <a:alpha val="0"/>
+      </a:srgbClr>
     </a:solidFill>
     <a:ln>
       <a:noFill/>
@@ -2188,9 +2192,16 @@
   <p:cSld name="Slide 1">
     <p:bg>
       <p:bgPr>
-        <a:solidFill>
-          <a:srgbClr val="0B1B33"/>
-        </a:solidFill>
+        <a:blipFill dpi="0" rotWithShape="1">
+          <a:blip r:embed="rId1">
+            <a:lum/>
+          </a:blip>
+          <a:srcRect/>
+          <a:stretch>
+            <a:fillRect/>
+          </a:stretch>
+        </a:blipFill>
+        <a:effectLst/>
       </p:bgPr>
     </p:bg>
     <p:spTree>
@@ -2442,9 +2453,16 @@
   <p:cSld name="Slide 2">
     <p:bg>
       <p:bgPr>
-        <a:solidFill>
-          <a:srgbClr val="0B1B33"/>
-        </a:solidFill>
+        <a:blipFill dpi="0" rotWithShape="1">
+          <a:blip r:embed="rId1">
+            <a:lum/>
+          </a:blip>
+          <a:srcRect/>
+          <a:stretch>
+            <a:fillRect/>
+          </a:stretch>
+        </a:blipFill>
+        <a:effectLst/>
       </p:bgPr>
     </p:bg>
     <p:spTree>
@@ -3835,9 +3853,16 @@
   <p:cSld name="Slide 3">
     <p:bg>
       <p:bgPr>
-        <a:solidFill>
-          <a:srgbClr val="0B1B33"/>
-        </a:solidFill>
+        <a:blipFill dpi="0" rotWithShape="1">
+          <a:blip r:embed="rId1">
+            <a:lum/>
+          </a:blip>
+          <a:srcRect/>
+          <a:stretch>
+            <a:fillRect/>
+          </a:stretch>
+        </a:blipFill>
+        <a:effectLst/>
       </p:bgPr>
     </p:bg>
     <p:spTree>
@@ -3971,9 +3996,35 @@
           </a:p>
         </p:txBody>
       </p:sp>
-      <p:sp>
-        <p:nvSpPr>
-          <p:cNvPr id="6" name="kpi-main"/>
+      <p:pic>
+        <p:nvPicPr>
+          <p:cNvPr id="6" name="Image 0" descr="assets/glow.png">    </p:cNvPr>
+          <p:cNvPicPr>
+            <a:picLocks noChangeAspect="1"/>
+          </p:cNvPicPr>
+          <p:nvPr/>
+        </p:nvPicPr>
+        <p:blipFill>
+          <a:blip r:embed="rId2">
+            <a:alphaModFix amt="65000"/>
+          </a:blip>
+          <a:stretch>
+            <a:fillRect/>
+          </a:stretch>
+        </p:blipFill>
+        <p:spPr>
+          <a:xfrm>
+            <a:off x="228600" y="1051560"/>
+            <a:ext cx="4480560" cy="4480560"/>
+          </a:xfrm>
+          <a:prstGeom prst="rect">
+            <a:avLst/>
+          </a:prstGeom>
+        </p:spPr>
+      </p:pic>
+      <p:sp>
+        <p:nvSpPr>
+          <p:cNvPr id="7" name="kpi-main"/>
           <p:cNvSpPr/>
           <p:nvPr/>
         </p:nvSpPr>
@@ -4012,7 +4063,7 @@
       </p:sp>
       <p:sp>
         <p:nvSpPr>
-          <p:cNvPr id="7" name="Text 4"/>
+          <p:cNvPr id="8" name="Text 4"/>
           <p:cNvSpPr/>
           <p:nvPr/>
         </p:nvSpPr>
@@ -4051,7 +4102,7 @@
       </p:sp>
       <p:sp>
         <p:nvSpPr>
-          <p:cNvPr id="8" name="ring-icon"/>
+          <p:cNvPr id="9" name="ring-icon"/>
           <p:cNvSpPr/>
           <p:nvPr/>
         </p:nvSpPr>
@@ -4078,7 +4129,7 @@
       </p:sp>
       <p:sp>
         <p:nvSpPr>
-          <p:cNvPr id="9" name="Text 6"/>
+          <p:cNvPr id="10" name="Text 6"/>
           <p:cNvSpPr/>
           <p:nvPr/>
         </p:nvSpPr>
@@ -4117,7 +4168,7 @@
       </p:sp>
       <p:sp>
         <p:nvSpPr>
-          <p:cNvPr id="10" name="txt-color"/>
+          <p:cNvPr id="11" name="txt-color"/>
           <p:cNvSpPr/>
           <p:nvPr/>
         </p:nvSpPr>
@@ -4156,7 +4207,7 @@
       </p:sp>
       <p:sp>
         <p:nvSpPr>
-          <p:cNvPr id="11" name="Text 8"/>
+          <p:cNvPr id="12" name="Text 8"/>
           <p:cNvSpPr/>
           <p:nvPr/>
         </p:nvSpPr>
@@ -4195,7 +4246,7 @@
       </p:sp>
       <p:sp>
         <p:nvSpPr>
-          <p:cNvPr id="12" name="bar-grow"/>
+          <p:cNvPr id="13" name="bar-grow"/>
           <p:cNvSpPr/>
           <p:nvPr/>
         </p:nvSpPr>
@@ -4217,7 +4268,7 @@
       </p:sp>
       <p:sp>
         <p:nvSpPr>
-          <p:cNvPr id="13" name="Text 10"/>
+          <p:cNvPr id="14" name="Text 10"/>
           <p:cNvSpPr/>
           <p:nvPr/>
         </p:nvSpPr>
@@ -4296,7 +4347,7 @@
                                           </p:stCondLst>
                                         </p:cTn>
                                         <p:tgtEl>
-                                          <p:spTgt spid="6"/>
+                                          <p:spTgt spid="7"/>
                                         </p:tgtEl>
                                         <p:attrNameLst>
                                           <p:attrName>style.visibility</p:attrName>
@@ -4310,7 +4361,7 @@
                                       <p:cBhvr>
                                         <p:cTn id="6" dur="500"/>
                                         <p:tgtEl>
-                                          <p:spTgt spid="6"/>
+                                          <p:spTgt spid="7"/>
                                         </p:tgtEl>
                                       </p:cBhvr>
                                     </p:animEffect>
@@ -4318,7 +4369,7 @@
                                       <p:cBhvr>
                                         <p:cTn id="7" dur="500"/>
                                         <p:tgtEl>
-                                          <p:spTgt spid="6"/>
+                                          <p:spTgt spid="7"/>
                                         </p:tgtEl>
                                       </p:cBhvr>
                                       <p:from x="30000" y="30000"/>
@@ -4346,7 +4397,7 @@
                                       <p:cBhvr>
                                         <p:cTn id="9" dur="600" autoRev="1" repeatCount="2x"/>
                                         <p:tgtEl>
-                                          <p:spTgt spid="6"/>
+                                          <p:spTgt spid="7"/>
                                         </p:tgtEl>
                                       </p:cBhvr>
                                       <p:from x="100000" y="100000"/>
@@ -4374,7 +4425,7 @@
                                       <p:cBhvr>
                                         <p:cTn id="11" dur="1200"/>
                                         <p:tgtEl>
-                                          <p:spTgt spid="8"/>
+                                          <p:spTgt spid="9"/>
                                         </p:tgtEl>
                                         <p:attrNameLst>
                                           <p:attrName>r</p:attrName>
@@ -4407,7 +4458,7 @@
                                           </p:stCondLst>
                                         </p:cTn>
                                         <p:tgtEl>
-                                          <p:spTgt spid="10"/>
+                                          <p:spTgt spid="11"/>
                                         </p:tgtEl>
                                         <p:attrNameLst>
                                           <p:attrName>style.visibility</p:attrName>
@@ -4421,7 +4472,7 @@
                                       <p:cBhvr>
                                         <p:cTn id="14" dur="350"/>
                                         <p:tgtEl>
-                                          <p:spTgt spid="10"/>
+                                          <p:spTgt spid="11"/>
                                         </p:tgtEl>
                                       </p:cBhvr>
                                     </p:animEffect>
@@ -4447,7 +4498,7 @@
                                       <p:cBhvr>
                                         <p:cTn id="16" dur="600"/>
                                         <p:tgtEl>
-                                          <p:spTgt spid="10"/>
+                                          <p:spTgt spid="11"/>
                                         </p:tgtEl>
                                         <p:attrNameLst>
                                           <p:attrName>style.color</p:attrName>
@@ -4479,7 +4530,7 @@
                                       <p:cBhvr>
                                         <p:cTn id="18" dur="600" autoRev="1" repeatCount="2x"/>
                                         <p:tgtEl>
-                                          <p:spTgt spid="12"/>
+                                          <p:spTgt spid="13"/>
                                         </p:tgtEl>
                                       </p:cBhvr>
                                       <p:to x="118000" y="118000"/>
@@ -4515,10 +4566,10 @@
       </p:par>
     </p:tnLst>
     <p:bldLst>
-      <p:bldP spid="6" grpId="0"/>
-      <p:bldP spid="8" grpId="0"/>
-      <p:bldP spid="10" grpId="0"/>
-      <p:bldP spid="12" grpId="0"/>
+      <p:bldP spid="7" grpId="0"/>
+      <p:bldP spid="9" grpId="0"/>
+      <p:bldP spid="11" grpId="0"/>
+      <p:bldP spid="13" grpId="0"/>
     </p:bldLst>
   </p:timing>
 </p:sld>
@@ -4529,9 +4580,16 @@
   <p:cSld name="Slide 4">
     <p:bg>
       <p:bgPr>
-        <a:solidFill>
-          <a:srgbClr val="0B1B33"/>
-        </a:solidFill>
+        <a:blipFill dpi="0" rotWithShape="1">
+          <a:blip r:embed="rId1">
+            <a:lum/>
+          </a:blip>
+          <a:srcRect/>
+          <a:stretch>
+            <a:fillRect/>
+          </a:stretch>
+        </a:blipFill>
+        <a:effectLst/>
       </p:bgPr>
     </p:bg>
     <p:spTree>
@@ -5083,9 +5141,16 @@
   <p:cSld name="Slide 5">
     <p:bg>
       <p:bgPr>
-        <a:solidFill>
-          <a:srgbClr val="0B1B33"/>
-        </a:solidFill>
+        <a:blipFill dpi="0" rotWithShape="1">
+          <a:blip r:embed="rId1">
+            <a:lum/>
+          </a:blip>
+          <a:srcRect/>
+          <a:stretch>
+            <a:fillRect/>
+          </a:stretch>
+        </a:blipFill>
+        <a:effectLst/>
       </p:bgPr>
     </p:bg>
     <p:spTree>
@@ -5174,7 +5239,7 @@
                 <a:ea typeface="微软雅黑" pitchFamily="34" charset="-122"/>
                 <a:cs typeface="微软雅黑" pitchFamily="34" charset="-120"/>
               </a:rPr>
-              <a:t>柱状图按 category 逐根升起 · 折线图按 series 逐条画出</a:t>
+              <a:t>PowerPoint：按类/按系列逐步构建 · WPS：图表随页面显示（兼容模式）</a:t>
             </a:r>
             <a:endParaRPr lang="en-US" sz="1400" dirty="0"/>
           </a:p>
@@ -5231,7 +5296,7 @@
         </p:xfrm>
         <a:graphic xmlns:a="http://schemas.openxmlformats.org/drawingml/2006/main">
           <a:graphicData uri="http://schemas.openxmlformats.org/drawingml/2006/chart">
-            <c:chart xmlns:c="http://schemas.openxmlformats.org/drawingml/2006/chart" r:id="rId1"/>
+            <c:chart xmlns:c="http://schemas.openxmlformats.org/drawingml/2006/chart" r:id="rId2"/>
           </a:graphicData>
         </a:graphic>
       </p:graphicFrame>
@@ -5247,7 +5312,7 @@
         </p:xfrm>
         <a:graphic xmlns:a="http://schemas.openxmlformats.org/drawingml/2006/main">
           <a:graphicData uri="http://schemas.openxmlformats.org/drawingml/2006/chart">
-            <c:chart xmlns:c="http://schemas.openxmlformats.org/drawingml/2006/chart" r:id="rId2"/>
+            <c:chart xmlns:c="http://schemas.openxmlformats.org/drawingml/2006/chart" r:id="rId3"/>
           </a:graphicData>
         </a:graphic>
       </p:graphicFrame>
@@ -5259,145 +5324,6 @@
   <p:transition spd="med">
     <p:wipe dir="l"/>
   </p:transition>
-  <p:timing>
-    <p:tnLst>
-      <p:par>
-        <p:cTn id="1" dur="indefinite" restart="never" nodeType="tmRoot">
-          <p:childTnLst>
-            <p:seq concurrent="1" nextAc="seek">
-              <p:cTn id="2" dur="indefinite" nodeType="mainSeq">
-                <p:childTnLst>
-                  <p:par>
-                    <p:cTn id="3" fill="hold">
-                      <p:stCondLst>
-                        <p:cond delay="0"/>
-                      </p:stCondLst>
-                      <p:childTnLst>
-                        <p:par>
-                          <p:cTn id="4" fill="hold">
-                            <p:stCondLst>
-                              <p:cond delay="0"/>
-                            </p:stCondLst>
-                            <p:childTnLst>
-                              <p:par>
-                                <p:cTn presetID="22" presetClass="entr" presetSubtype="4" fill="hold" grpId="0" nodeType="afterEffect">
-                                  <p:stCondLst>
-                                    <p:cond delay="0"/>
-                                  </p:stCondLst>
-                                  <p:childTnLst>
-                                    <p:set>
-                                      <p:cBhvr>
-                                        <p:cTn id="5" dur="1" fill="hold">
-                                          <p:stCondLst>
-                                            <p:cond delay="0"/>
-                                          </p:stCondLst>
-                                        </p:cTn>
-                                        <p:tgtEl>
-                                          <p:spTgt spid="6"/>
-                                        </p:tgtEl>
-                                        <p:attrNameLst>
-                                          <p:attrName>style.visibility</p:attrName>
-                                        </p:attrNameLst>
-                                      </p:cBhvr>
-                                      <p:to>
-                                        <p:strVal val="visible"/>
-                                      </p:to>
-                                    </p:set>
-                                    <p:animEffect transition="in" filter="wipe(up)">
-                                      <p:cBhvr>
-                                        <p:cTn id="6" dur="700"/>
-                                        <p:tgtEl>
-                                          <p:spTgt spid="6"/>
-                                        </p:tgtEl>
-                                      </p:cBhvr>
-                                    </p:animEffect>
-                                  </p:childTnLst>
-                                </p:cTn>
-                              </p:par>
-                            </p:childTnLst>
-                          </p:cTn>
-                        </p:par>
-                        <p:par>
-                          <p:cTn id="7" fill="hold">
-                            <p:stCondLst>
-                              <p:cond delay="700"/>
-                            </p:stCondLst>
-                            <p:childTnLst>
-                              <p:par>
-                                <p:cTn presetID="10" presetClass="entr" presetSubtype="0" fill="hold" grpId="0" nodeType="afterEffect">
-                                  <p:stCondLst>
-                                    <p:cond delay="0"/>
-                                  </p:stCondLst>
-                                  <p:childTnLst>
-                                    <p:set>
-                                      <p:cBhvr>
-                                        <p:cTn id="8" dur="1" fill="hold">
-                                          <p:stCondLst>
-                                            <p:cond delay="0"/>
-                                          </p:stCondLst>
-                                        </p:cTn>
-                                        <p:tgtEl>
-                                          <p:spTgt spid="7"/>
-                                        </p:tgtEl>
-                                        <p:attrNameLst>
-                                          <p:attrName>style.visibility</p:attrName>
-                                        </p:attrNameLst>
-                                      </p:cBhvr>
-                                      <p:to>
-                                        <p:strVal val="visible"/>
-                                      </p:to>
-                                    </p:set>
-                                    <p:animEffect transition="in" filter="fade">
-                                      <p:cBhvr>
-                                        <p:cTn id="9" dur="700"/>
-                                        <p:tgtEl>
-                                          <p:spTgt spid="7"/>
-                                        </p:tgtEl>
-                                      </p:cBhvr>
-                                    </p:animEffect>
-                                  </p:childTnLst>
-                                </p:cTn>
-                              </p:par>
-                            </p:childTnLst>
-                          </p:cTn>
-                        </p:par>
-                      </p:childTnLst>
-                    </p:cTn>
-                  </p:par>
-                </p:childTnLst>
-              </p:cTn>
-              <p:prevCondLst>
-                <p:cond evt="onPrev" delay="0">
-                  <p:tgtEl>
-                    <p:sldTgt/>
-                  </p:tgtEl>
-                </p:cond>
-              </p:prevCondLst>
-              <p:nextCondLst>
-                <p:cond evt="onNext" delay="0">
-                  <p:tgtEl>
-                    <p:sldTgt/>
-                  </p:tgtEl>
-                </p:cond>
-              </p:nextCondLst>
-            </p:seq>
-          </p:childTnLst>
-        </p:cTn>
-      </p:par>
-    </p:tnLst>
-    <p:bldLst>
-      <p:bldGraphic spid="6" grpId="0">
-        <p:bldSub>
-          <a:bldChart bld="category" animBg="1"/>
-        </p:bldSub>
-      </p:bldGraphic>
-      <p:bldGraphic spid="7" grpId="0">
-        <p:bldSub>
-          <a:bldChart bld="series" animBg="1"/>
-        </p:bldSub>
-      </p:bldGraphic>
-    </p:bldLst>
-  </p:timing>
 </p:sld>
 </file>
 
@@ -5406,9 +5332,16 @@
   <p:cSld name="Slide 6">
     <p:bg>
       <p:bgPr>
-        <a:solidFill>
-          <a:srgbClr val="0B1B33"/>
-        </a:solidFill>
+        <a:blipFill dpi="0" rotWithShape="1">
+          <a:blip r:embed="rId1">
+            <a:lum/>
+          </a:blip>
+          <a:srcRect/>
+          <a:stretch>
+            <a:fillRect/>
+          </a:stretch>
+        </a:blipFill>
+        <a:effectLst/>
       </p:bgPr>
     </p:bg>
     <p:spTree>
@@ -5925,9 +5858,16 @@
   <p:cSld name="Slide 7">
     <p:bg>
       <p:bgPr>
-        <a:solidFill>
-          <a:srgbClr val="0B1B33"/>
-        </a:solidFill>
+        <a:blipFill dpi="0" rotWithShape="1">
+          <a:blip r:embed="rId1">
+            <a:lum/>
+          </a:blip>
+          <a:srcRect/>
+          <a:stretch>
+            <a:fillRect/>
+          </a:stretch>
+        </a:blipFill>
+        <a:effectLst/>
       </p:bgPr>
     </p:bg>
     <p:spTree>
@@ -6761,9 +6701,16 @@
   <p:cSld name="Slide 8">
     <p:bg>
       <p:bgPr>
-        <a:solidFill>
-          <a:srgbClr val="0B1B33"/>
-        </a:solidFill>
+        <a:blipFill dpi="0" rotWithShape="1">
+          <a:blip r:embed="rId1">
+            <a:lum/>
+          </a:blip>
+          <a:srcRect/>
+          <a:stretch>
+            <a:fillRect/>
+          </a:stretch>
+        </a:blipFill>
+        <a:effectLst/>
       </p:bgPr>
     </p:bg>
     <p:spTree>

--- a/examples/effects-showcase/动效能力演示.pptx
+++ b/examples/effects-showcase/动效能力演示.pptx
@@ -2315,7 +2315,10 @@
                   <p:par>
                     <p:cTn id="3" fill="hold">
                       <p:stCondLst>
-                        <p:cond delay="0"/>
+                        <p:cond delay="indefinite"/>
+                        <p:cond evt="onBegin" delay="0">
+                          <p:tn val="2"/>
+                        </p:cond>
                       </p:stCondLst>
                       <p:childTnLst>
                         <p:par>
@@ -2350,7 +2353,7 @@
                                     </p:set>
                                     <p:animEffect transition="in" filter="fade">
                                       <p:cBhvr>
-                                        <p:cTn id="6" dur="700"/>
+                                        <p:cTn id="6" dur="520"/>
                                         <p:tgtEl>
                                           <p:spTgt spid="2"/>
                                         </p:tgtEl>
@@ -2358,12 +2361,12 @@
                                     </p:animEffect>
                                     <p:animScale>
                                       <p:cBhvr>
-                                        <p:cTn id="7" dur="700"/>
+                                        <p:cTn id="7" dur="520"/>
                                         <p:tgtEl>
                                           <p:spTgt spid="2"/>
                                         </p:tgtEl>
                                       </p:cBhvr>
-                                      <p:from x="30000" y="30000"/>
+                                      <p:from x="55000" y="55000"/>
                                       <p:to x="100000" y="100000"/>
                                     </p:animScale>
                                   </p:childTnLst>
@@ -2375,7 +2378,7 @@
                         <p:par>
                           <p:cTn id="8" fill="hold">
                             <p:stCondLst>
-                              <p:cond delay="700"/>
+                              <p:cond delay="470"/>
                             </p:stCondLst>
                             <p:childTnLst>
                               <p:par>
@@ -2404,7 +2407,7 @@
                                     </p:set>
                                     <p:animEffect transition="in" filter="fade">
                                       <p:cBhvr>
-                                        <p:cTn id="10" dur="400"/>
+                                        <p:cTn id="10" dur="380"/>
                                         <p:tgtEl>
                                           <p:spTgt spid="3"/>
                                         </p:tgtEl>
@@ -3455,7 +3458,10 @@
                   <p:par>
                     <p:cTn id="3" fill="hold">
                       <p:stCondLst>
-                        <p:cond delay="0"/>
+                        <p:cond delay="indefinite"/>
+                        <p:cond evt="onBegin" delay="0">
+                          <p:tn val="2"/>
+                        </p:cond>
                       </p:stCondLst>
                       <p:childTnLst>
                         <p:par>
@@ -4324,7 +4330,10 @@
                   <p:par>
                     <p:cTn id="3" fill="hold">
                       <p:stCondLst>
-                        <p:cond delay="0"/>
+                        <p:cond delay="indefinite"/>
+                        <p:cond evt="onBegin" delay="0">
+                          <p:tn val="2"/>
+                        </p:cond>
                       </p:stCondLst>
                       <p:childTnLst>
                         <p:par>
@@ -4445,50 +4454,6 @@
                             </p:stCondLst>
                             <p:childTnLst>
                               <p:par>
-                                <p:cTn presetID="10" presetClass="entr" presetSubtype="0" fill="hold" grpId="0" nodeType="afterEffect">
-                                  <p:stCondLst>
-                                    <p:cond delay="0"/>
-                                  </p:stCondLst>
-                                  <p:childTnLst>
-                                    <p:set>
-                                      <p:cBhvr>
-                                        <p:cTn id="13" dur="1" fill="hold">
-                                          <p:stCondLst>
-                                            <p:cond delay="0"/>
-                                          </p:stCondLst>
-                                        </p:cTn>
-                                        <p:tgtEl>
-                                          <p:spTgt spid="11"/>
-                                        </p:tgtEl>
-                                        <p:attrNameLst>
-                                          <p:attrName>style.visibility</p:attrName>
-                                        </p:attrNameLst>
-                                      </p:cBhvr>
-                                      <p:to>
-                                        <p:strVal val="visible"/>
-                                      </p:to>
-                                    </p:set>
-                                    <p:animEffect transition="in" filter="fade">
-                                      <p:cBhvr>
-                                        <p:cTn id="14" dur="350"/>
-                                        <p:tgtEl>
-                                          <p:spTgt spid="11"/>
-                                        </p:tgtEl>
-                                      </p:cBhvr>
-                                    </p:animEffect>
-                                  </p:childTnLst>
-                                </p:cTn>
-                              </p:par>
-                            </p:childTnLst>
-                          </p:cTn>
-                        </p:par>
-                        <p:par>
-                          <p:cTn id="15" fill="hold">
-                            <p:stCondLst>
-                              <p:cond delay="2650"/>
-                            </p:stCondLst>
-                            <p:childTnLst>
-                              <p:par>
                                 <p:cTn presetID="1" presetClass="emph" presetSubtype="0" fill="hold" grpId="0" nodeType="afterEffect">
                                   <p:stCondLst>
                                     <p:cond delay="0"/>
@@ -4496,7 +4461,7 @@
                                   <p:childTnLst>
                                     <p:animClr clrSpc="rgb" dir="cw">
                                       <p:cBhvr>
-                                        <p:cTn id="16" dur="600"/>
+                                        <p:cTn id="13" dur="600"/>
                                         <p:tgtEl>
                                           <p:spTgt spid="11"/>
                                         </p:tgtEl>
@@ -4515,9 +4480,9 @@
                           </p:cTn>
                         </p:par>
                         <p:par>
-                          <p:cTn id="17" fill="hold">
+                          <p:cTn id="14" fill="hold">
                             <p:stCondLst>
-                              <p:cond delay="3250"/>
+                              <p:cond delay="2900"/>
                             </p:stCondLst>
                             <p:childTnLst>
                               <p:par>
@@ -4528,7 +4493,7 @@
                                   <p:childTnLst>
                                     <p:animScale>
                                       <p:cBhvr>
-                                        <p:cTn id="18" dur="600" autoRev="1" repeatCount="2x"/>
+                                        <p:cTn id="15" dur="600" autoRev="1" repeatCount="2x"/>
                                         <p:tgtEl>
                                           <p:spTgt spid="13"/>
                                         </p:tgtEl>
@@ -4961,57 +4926,16 @@
                   <p:par>
                     <p:cTn id="3" fill="hold">
                       <p:stCondLst>
-                        <p:cond delay="0"/>
+                        <p:cond delay="indefinite"/>
+                        <p:cond evt="onBegin" delay="0">
+                          <p:tn val="2"/>
+                        </p:cond>
                       </p:stCondLst>
                       <p:childTnLst>
                         <p:par>
                           <p:cTn id="4" fill="hold">
                             <p:stCondLst>
                               <p:cond delay="0"/>
-                            </p:stCondLst>
-                            <p:childTnLst>
-                              <p:par>
-                                <p:cTn presetID="10" presetClass="entr" presetSubtype="0" fill="hold" grpId="0" nodeType="afterEffect">
-                                  <p:stCondLst>
-                                    <p:cond delay="0"/>
-                                  </p:stCondLst>
-                                  <p:childTnLst>
-                                    <p:set>
-                                      <p:cBhvr>
-                                        <p:cTn id="5" dur="1" fill="hold">
-                                          <p:stCondLst>
-                                            <p:cond delay="0"/>
-                                          </p:stCondLst>
-                                        </p:cTn>
-                                        <p:tgtEl>
-                                          <p:spTgt spid="6"/>
-                                        </p:tgtEl>
-                                        <p:attrNameLst>
-                                          <p:attrName>style.visibility</p:attrName>
-                                        </p:attrNameLst>
-                                      </p:cBhvr>
-                                      <p:to>
-                                        <p:strVal val="visible"/>
-                                      </p:to>
-                                    </p:set>
-                                    <p:animEffect transition="in" filter="fade">
-                                      <p:cBhvr>
-                                        <p:cTn id="6" dur="300"/>
-                                        <p:tgtEl>
-                                          <p:spTgt spid="6"/>
-                                        </p:tgtEl>
-                                      </p:cBhvr>
-                                    </p:animEffect>
-                                  </p:childTnLst>
-                                </p:cTn>
-                              </p:par>
-                            </p:childTnLst>
-                          </p:cTn>
-                        </p:par>
-                        <p:par>
-                          <p:cTn id="7" fill="hold">
-                            <p:stCondLst>
-                              <p:cond delay="300"/>
                             </p:stCondLst>
                             <p:childTnLst>
                               <p:par>
@@ -5022,7 +4946,7 @@
                                   <p:childTnLst>
                                     <p:animMotion origin="layout" pathEditMode="relative" path="M 0 0 L 0.32 -0.06 E" ptsTypes="AA">
                                       <p:cBhvr>
-                                        <p:cTn id="8" dur="900" autoRev="1" repeatCount="3x"/>
+                                        <p:cTn id="5" dur="900" autoRev="1" repeatCount="3x"/>
                                         <p:tgtEl>
                                           <p:spTgt spid="6"/>
                                         </p:tgtEl>
@@ -5035,53 +4959,9 @@
                           </p:cTn>
                         </p:par>
                         <p:par>
-                          <p:cTn id="9" fill="hold">
+                          <p:cTn id="6" fill="hold">
                             <p:stCondLst>
-                              <p:cond delay="1200"/>
-                            </p:stCondLst>
-                            <p:childTnLst>
-                              <p:par>
-                                <p:cTn presetID="10" presetClass="entr" presetSubtype="0" fill="hold" grpId="0" nodeType="afterEffect">
-                                  <p:stCondLst>
-                                    <p:cond delay="0"/>
-                                  </p:stCondLst>
-                                  <p:childTnLst>
-                                    <p:set>
-                                      <p:cBhvr>
-                                        <p:cTn id="10" dur="1" fill="hold">
-                                          <p:stCondLst>
-                                            <p:cond delay="0"/>
-                                          </p:stCondLst>
-                                        </p:cTn>
-                                        <p:tgtEl>
-                                          <p:spTgt spid="8"/>
-                                        </p:tgtEl>
-                                        <p:attrNameLst>
-                                          <p:attrName>style.visibility</p:attrName>
-                                        </p:attrNameLst>
-                                      </p:cBhvr>
-                                      <p:to>
-                                        <p:strVal val="visible"/>
-                                      </p:to>
-                                    </p:set>
-                                    <p:animEffect transition="in" filter="fade">
-                                      <p:cBhvr>
-                                        <p:cTn id="11" dur="300"/>
-                                        <p:tgtEl>
-                                          <p:spTgt spid="8"/>
-                                        </p:tgtEl>
-                                      </p:cBhvr>
-                                    </p:animEffect>
-                                  </p:childTnLst>
-                                </p:cTn>
-                              </p:par>
-                            </p:childTnLst>
-                          </p:cTn>
-                        </p:par>
-                        <p:par>
-                          <p:cTn id="12" fill="hold">
-                            <p:stCondLst>
-                              <p:cond delay="1500"/>
+                              <p:cond delay="900"/>
                             </p:stCondLst>
                             <p:childTnLst>
                               <p:par>
@@ -5092,7 +4972,7 @@
                                   <p:childTnLst>
                                     <p:animMotion origin="layout" pathEditMode="relative" path="M 0 0 L 0.3 0 E" ptsTypes="AA">
                                       <p:cBhvr>
-                                        <p:cTn id="13" dur="800" autoRev="1" repeatCount="2x"/>
+                                        <p:cTn id="7" dur="800" autoRev="1" repeatCount="2x"/>
                                         <p:tgtEl>
                                           <p:spTgt spid="8"/>
                                         </p:tgtEl>
@@ -6277,7 +6157,10 @@
                   <p:par>
                     <p:cTn id="3" fill="hold">
                       <p:stCondLst>
-                        <p:cond delay="0"/>
+                        <p:cond delay="indefinite"/>
+                        <p:cond evt="onBegin" delay="0">
+                          <p:tn val="2"/>
+                        </p:cond>
                       </p:stCondLst>
                       <p:childTnLst>
                         <p:par>
@@ -6824,7 +6707,10 @@
                   <p:par>
                     <p:cTn id="3" fill="hold">
                       <p:stCondLst>
-                        <p:cond delay="0"/>
+                        <p:cond delay="indefinite"/>
+                        <p:cond evt="onBegin" delay="0">
+                          <p:tn val="2"/>
+                        </p:cond>
                       </p:stCondLst>
                       <p:childTnLst>
                         <p:par>
@@ -6834,7 +6720,7 @@
                             </p:stCondLst>
                             <p:childTnLst>
                               <p:par>
-                                <p:cTn presetID="10" presetClass="entr" presetSubtype="0" fill="hold" grpId="0" nodeType="afterEffect">
+                                <p:cTn presetID="23" presetClass="entr" presetSubtype="16" fill="hold" grpId="0" nodeType="afterEffect">
                                   <p:stCondLst>
                                     <p:cond delay="0"/>
                                   </p:stCondLst>
@@ -6859,9 +6745,63 @@
                                     </p:set>
                                     <p:animEffect transition="in" filter="fade">
                                       <p:cBhvr>
-                                        <p:cTn id="6" dur="500"/>
+                                        <p:cTn id="6" dur="520"/>
                                         <p:tgtEl>
                                           <p:spTgt spid="2"/>
+                                        </p:tgtEl>
+                                      </p:cBhvr>
+                                    </p:animEffect>
+                                    <p:animScale>
+                                      <p:cBhvr>
+                                        <p:cTn id="7" dur="520"/>
+                                        <p:tgtEl>
+                                          <p:spTgt spid="2"/>
+                                        </p:tgtEl>
+                                      </p:cBhvr>
+                                      <p:from x="55000" y="55000"/>
+                                      <p:to x="100000" y="100000"/>
+                                    </p:animScale>
+                                  </p:childTnLst>
+                                </p:cTn>
+                              </p:par>
+                            </p:childTnLst>
+                          </p:cTn>
+                        </p:par>
+                        <p:par>
+                          <p:cTn id="8" fill="hold">
+                            <p:stCondLst>
+                              <p:cond delay="470"/>
+                            </p:stCondLst>
+                            <p:childTnLst>
+                              <p:par>
+                                <p:cTn presetID="10" presetClass="entr" presetSubtype="0" fill="hold" grpId="0" nodeType="afterEffect">
+                                  <p:stCondLst>
+                                    <p:cond delay="0"/>
+                                  </p:stCondLst>
+                                  <p:childTnLst>
+                                    <p:set>
+                                      <p:cBhvr>
+                                        <p:cTn id="9" dur="1" fill="hold">
+                                          <p:stCondLst>
+                                            <p:cond delay="0"/>
+                                          </p:stCondLst>
+                                        </p:cTn>
+                                        <p:tgtEl>
+                                          <p:spTgt spid="3"/>
+                                        </p:tgtEl>
+                                        <p:attrNameLst>
+                                          <p:attrName>style.visibility</p:attrName>
+                                        </p:attrNameLst>
+                                      </p:cBhvr>
+                                      <p:to>
+                                        <p:strVal val="visible"/>
+                                      </p:to>
+                                    </p:set>
+                                    <p:animEffect transition="in" filter="fade">
+                                      <p:cBhvr>
+                                        <p:cTn id="10" dur="380"/>
+                                        <p:tgtEl>
+                                          <p:spTgt spid="3"/>
                                         </p:tgtEl>
                                       </p:cBhvr>
                                     </p:animEffect>
@@ -6897,6 +6837,7 @@
     </p:tnLst>
     <p:bldLst>
       <p:bldP spid="2" grpId="0"/>
+      <p:bldP spid="3" grpId="0"/>
     </p:bldLst>
   </p:timing>
 </p:sld>
